--- a/exports/cv-edited.pptx
+++ b/exports/cv-edited.pptx
@@ -211,7 +211,7 @@
           <a:p>
             <a:fld id="{00F41C98-2E5E-6A45-8B22-7C7B45C05832}" type="datetimeFigureOut">
               <a:rPr lang="en-FR" smtClean="0"/>
-              <a:t>28/10/2026</a:t>
+              <a:t>29/10/2026</a:t>
             </a:fld>
             <a:endParaRPr lang="en-FR"/>
           </a:p>
@@ -826,7 +826,7 @@
           <a:p>
             <a:fld id="{5BCAD085-E8A6-8845-BD4E-CB4CCA059FC4}" type="datetimeFigureOut">
               <a:rPr lang="en-US" smtClean="0"/>
-              <a:t>10/28/26</a:t>
+              <a:t>10/29/26</a:t>
             </a:fld>
             <a:endParaRPr lang="en-US"/>
           </a:p>
@@ -994,7 +994,7 @@
           <a:p>
             <a:fld id="{5BCAD085-E8A6-8845-BD4E-CB4CCA059FC4}" type="datetimeFigureOut">
               <a:rPr lang="en-US" smtClean="0"/>
-              <a:t>10/28/26</a:t>
+              <a:t>10/29/26</a:t>
             </a:fld>
             <a:endParaRPr lang="en-US"/>
           </a:p>
@@ -1172,7 +1172,7 @@
           <a:p>
             <a:fld id="{5BCAD085-E8A6-8845-BD4E-CB4CCA059FC4}" type="datetimeFigureOut">
               <a:rPr lang="en-US" smtClean="0"/>
-              <a:t>10/28/26</a:t>
+              <a:t>10/29/26</a:t>
             </a:fld>
             <a:endParaRPr lang="en-US"/>
           </a:p>
@@ -1340,7 +1340,7 @@
           <a:p>
             <a:fld id="{5BCAD085-E8A6-8845-BD4E-CB4CCA059FC4}" type="datetimeFigureOut">
               <a:rPr lang="en-US" smtClean="0"/>
-              <a:t>10/28/26</a:t>
+              <a:t>10/29/26</a:t>
             </a:fld>
             <a:endParaRPr lang="en-US"/>
           </a:p>
@@ -1585,7 +1585,7 @@
           <a:p>
             <a:fld id="{5BCAD085-E8A6-8845-BD4E-CB4CCA059FC4}" type="datetimeFigureOut">
               <a:rPr lang="en-US" smtClean="0"/>
-              <a:t>10/28/26</a:t>
+              <a:t>10/29/26</a:t>
             </a:fld>
             <a:endParaRPr lang="en-US"/>
           </a:p>
@@ -1870,7 +1870,7 @@
           <a:p>
             <a:fld id="{5BCAD085-E8A6-8845-BD4E-CB4CCA059FC4}" type="datetimeFigureOut">
               <a:rPr lang="en-US" smtClean="0"/>
-              <a:t>10/28/26</a:t>
+              <a:t>10/29/26</a:t>
             </a:fld>
             <a:endParaRPr lang="en-US"/>
           </a:p>
@@ -2289,7 +2289,7 @@
           <a:p>
             <a:fld id="{5BCAD085-E8A6-8845-BD4E-CB4CCA059FC4}" type="datetimeFigureOut">
               <a:rPr lang="en-US" smtClean="0"/>
-              <a:t>10/28/26</a:t>
+              <a:t>10/29/26</a:t>
             </a:fld>
             <a:endParaRPr lang="en-US"/>
           </a:p>
@@ -2406,7 +2406,7 @@
           <a:p>
             <a:fld id="{5BCAD085-E8A6-8845-BD4E-CB4CCA059FC4}" type="datetimeFigureOut">
               <a:rPr lang="en-US" smtClean="0"/>
-              <a:t>10/28/26</a:t>
+              <a:t>10/29/26</a:t>
             </a:fld>
             <a:endParaRPr lang="en-US"/>
           </a:p>
@@ -2501,7 +2501,7 @@
           <a:p>
             <a:fld id="{5BCAD085-E8A6-8845-BD4E-CB4CCA059FC4}" type="datetimeFigureOut">
               <a:rPr lang="en-US" smtClean="0"/>
-              <a:t>10/28/26</a:t>
+              <a:t>10/29/26</a:t>
             </a:fld>
             <a:endParaRPr lang="en-US"/>
           </a:p>
@@ -2776,7 +2776,7 @@
           <a:p>
             <a:fld id="{5BCAD085-E8A6-8845-BD4E-CB4CCA059FC4}" type="datetimeFigureOut">
               <a:rPr lang="en-US" smtClean="0"/>
-              <a:t>10/28/26</a:t>
+              <a:t>10/29/26</a:t>
             </a:fld>
             <a:endParaRPr lang="en-US"/>
           </a:p>
@@ -3028,7 +3028,7 @@
           <a:p>
             <a:fld id="{5BCAD085-E8A6-8845-BD4E-CB4CCA059FC4}" type="datetimeFigureOut">
               <a:rPr lang="en-US" smtClean="0"/>
-              <a:t>10/28/26</a:t>
+              <a:t>10/29/26</a:t>
             </a:fld>
             <a:endParaRPr lang="en-US"/>
           </a:p>
@@ -3239,7 +3239,7 @@
           <a:p>
             <a:fld id="{5BCAD085-E8A6-8845-BD4E-CB4CCA059FC4}" type="datetimeFigureOut">
               <a:rPr lang="en-US" smtClean="0"/>
-              <a:t>10/28/26</a:t>
+              <a:t>10/29/26</a:t>
             </a:fld>
             <a:endParaRPr lang="en-US"/>
           </a:p>
@@ -3847,25 +3847,7 @@
                 </a:solidFill>
                 <a:latin typeface="Helvetica Light" panose="020B0403020202020204" pitchFamily="34" charset="0"/>
               </a:rPr>
-              <a:t>gino.battistello@icm-institute.</a:t>
-            </a:r>
-            <a:r>
-              <a:rPr lang="en-GB" sz="900" dirty="0">
-                <a:solidFill>
-                  <a:srgbClr val="666666"/>
-                </a:solidFill>
-                <a:latin typeface="Helvetica Light" panose="020B0403020202020204" pitchFamily="34" charset="0"/>
-              </a:rPr>
-              <a:t>org</a:t>
-            </a:r>
-            <a:r>
-              <a:rPr lang="en-GB" sz="900" dirty="0">
-                <a:solidFill>
-                  <a:srgbClr val="666666"/>
-                </a:solidFill>
-                <a:latin typeface="Helvetica Light" panose="020B0403020202020204" pitchFamily="34" charset="0"/>
-              </a:rPr>
-              <a:t> </a:t>
+              <a:t>gino.battistello@icm-institute.org </a:t>
             </a:r>
             <a:endParaRPr sz="900" dirty="0">
               <a:solidFill>
@@ -3893,16 +3875,7 @@
                 </a:solidFill>
                 <a:latin typeface="Helvetica Light" panose="020B0403020202020204" pitchFamily="34" charset="0"/>
               </a:rPr>
-              <a:t>ginobattistello.github.</a:t>
-            </a:r>
-            <a:r>
-              <a:rPr sz="900" dirty="0">
-                <a:solidFill>
-                  <a:srgbClr val="666666"/>
-                </a:solidFill>
-                <a:latin typeface="Helvetica Light" panose="020B0403020202020204" pitchFamily="34" charset="0"/>
-              </a:rPr>
-              <a:t>i</a:t>
+              <a:t>ginobattistello.github.i</a:t>
             </a:r>
             <a:r>
               <a:rPr lang="fr-FR" sz="900" dirty="0">
@@ -3963,6 +3936,30 @@
               </a:rPr>
               <a:t>Google Scholar · GitHub</a:t>
             </a:r>
+            <a:r>
+              <a:rPr lang="fr-FR" sz="900" dirty="0">
+                <a:solidFill>
+                  <a:srgbClr val="666666"/>
+                </a:solidFill>
+                <a:latin typeface="Helvetica Light" panose="020B0403020202020204" pitchFamily="34" charset="0"/>
+              </a:rPr>
+              <a:t> · </a:t>
+            </a:r>
+            <a:r>
+              <a:rPr lang="fr-FR" sz="900" dirty="0" err="1">
+                <a:solidFill>
+                  <a:srgbClr val="666666"/>
+                </a:solidFill>
+                <a:latin typeface="Helvetica Light" panose="020B0403020202020204" pitchFamily="34" charset="0"/>
+              </a:rPr>
+              <a:t>Linkedln</a:t>
+            </a:r>
+            <a:endParaRPr sz="900" dirty="0">
+              <a:solidFill>
+                <a:srgbClr val="666666"/>
+              </a:solidFill>
+              <a:latin typeface="Helvetica Light" panose="020B0403020202020204" pitchFamily="34" charset="0"/>
+            </a:endParaRPr>
           </a:p>
           <a:p>
             <a:pPr algn="r">
@@ -6439,13 +6436,22 @@
               </a:spcAft>
             </a:pPr>
             <a:r>
-              <a:rPr sz="800" b="0">
+              <a:rPr sz="800" b="0" dirty="0">
                 <a:solidFill>
                   <a:srgbClr val="9A9A9A"/>
                 </a:solidFill>
                 <a:latin typeface="Helvetica" pitchFamily="2" charset="0"/>
               </a:rPr>
-              <a:t>1 / 6</a:t>
+              <a:t>1 </a:t>
+            </a:r>
+            <a:r>
+              <a:rPr lang="en-FR" sz="800" b="0" dirty="0">
+                <a:solidFill>
+                  <a:srgbClr val="9A9A9A"/>
+                </a:solidFill>
+                <a:latin typeface="Helvetica" pitchFamily="2" charset="0"/>
+              </a:rPr>
+              <a:t>/ 4</a:t>
             </a:r>
           </a:p>
         </p:txBody>
@@ -6668,7 +6674,7 @@
         </p:nvSpPr>
         <p:spPr>
           <a:xfrm>
-            <a:off x="5699125" y="1052474"/>
+            <a:off x="5172733" y="1049124"/>
             <a:ext cx="843229" cy="144729"/>
           </a:xfrm>
           <a:prstGeom prst="rect">
@@ -6718,7 +6724,7 @@
         </p:nvSpPr>
         <p:spPr>
           <a:xfrm>
-            <a:off x="6597650" y="1052043"/>
+            <a:off x="6096000" y="1048105"/>
             <a:ext cx="386028" cy="144729"/>
           </a:xfrm>
           <a:prstGeom prst="rect">
@@ -8271,6 +8277,56 @@
           </a:p>
         </p:txBody>
       </p:sp>
+      <p:sp>
+        <p:nvSpPr>
+          <p:cNvPr id="5" name="Rectangle 4">
+            <a:hlinkClick r:id="rId8"/>
+            <a:extLst>
+              <a:ext uri="{FF2B5EF4-FFF2-40B4-BE49-F238E27FC236}">
+                <a16:creationId xmlns:a16="http://schemas.microsoft.com/office/drawing/2014/main" id="{39207499-2CDC-1526-82DA-092CEA150F84}"/>
+              </a:ext>
+            </a:extLst>
+          </p:cNvPr>
+          <p:cNvSpPr/>
+          <p:nvPr/>
+        </p:nvSpPr>
+        <p:spPr>
+          <a:xfrm>
+            <a:off x="6537325" y="1055239"/>
+            <a:ext cx="450456" cy="144729"/>
+          </a:xfrm>
+          <a:prstGeom prst="rect">
+            <a:avLst/>
+          </a:prstGeom>
+          <a:noFill/>
+          <a:ln>
+            <a:noFill/>
+          </a:ln>
+          <a:effectLst/>
+        </p:spPr>
+        <p:style>
+          <a:lnRef idx="1">
+            <a:schemeClr val="accent1"/>
+          </a:lnRef>
+          <a:fillRef idx="3">
+            <a:schemeClr val="accent1"/>
+          </a:fillRef>
+          <a:effectRef idx="2">
+            <a:schemeClr val="accent1"/>
+          </a:effectRef>
+          <a:fontRef idx="minor">
+            <a:schemeClr val="lt1"/>
+          </a:fontRef>
+        </p:style>
+        <p:txBody>
+          <a:bodyPr rtlCol="0" anchor="ctr"/>
+          <a:lstStyle/>
+          <a:p>
+            <a:pPr algn="ctr"/>
+            <a:endParaRPr lang="en-FR"/>
+          </a:p>
+        </p:txBody>
+      </p:sp>
     </p:spTree>
   </p:cSld>
   <p:clrMapOvr>
@@ -8689,20 +8745,6 @@
                 </a:rPr>
                 <a:t>10.1038/s44271-025-00285-8</a:t>
               </a:r>
-              <a:endParaRPr lang="en-GB" dirty="0">
-                <a:solidFill>
-                  <a:schemeClr val="bg1">
-                    <a:lumMod val="50000"/>
-                  </a:schemeClr>
-                </a:solidFill>
-                <a:hlinkClick r:id="rId2">
-                  <a:extLst>
-                    <a:ext uri="{A12FA001-AC4F-418D-AE19-62706E023703}">
-                      <ahyp:hlinkClr xmlns:ahyp="http://schemas.microsoft.com/office/drawing/2018/hyperlinkcolor" val="tx"/>
-                    </a:ext>
-                  </a:extLst>
-                </a:hlinkClick>
-              </a:endParaRPr>
             </a:p>
           </p:txBody>
         </p:sp>
@@ -11372,14 +11414,29 @@
               </a:spcAft>
             </a:pPr>
             <a:r>
-              <a:rPr sz="800" b="0">
+              <a:rPr sz="800" b="0" dirty="0">
                 <a:solidFill>
                   <a:srgbClr val="9A9A9A"/>
                 </a:solidFill>
                 <a:latin typeface="Helvetica" pitchFamily="2" charset="0"/>
               </a:rPr>
-              <a:t>2 / 6</a:t>
+              <a:t>2 / </a:t>
             </a:r>
+            <a:r>
+              <a:rPr lang="fr-FR" sz="800" dirty="0">
+                <a:solidFill>
+                  <a:srgbClr val="9A9A9A"/>
+                </a:solidFill>
+                <a:latin typeface="Helvetica" pitchFamily="2" charset="0"/>
+              </a:rPr>
+              <a:t>4</a:t>
+            </a:r>
+            <a:endParaRPr sz="800" b="0" dirty="0">
+              <a:solidFill>
+                <a:srgbClr val="9A9A9A"/>
+              </a:solidFill>
+              <a:latin typeface="Helvetica" pitchFamily="2" charset="0"/>
+            </a:endParaRPr>
           </a:p>
         </p:txBody>
       </p:sp>
@@ -14824,14 +14881,29 @@
               </a:spcAft>
             </a:pPr>
             <a:r>
-              <a:rPr sz="800" b="0">
+              <a:rPr sz="800" b="0" dirty="0">
                 <a:solidFill>
                   <a:srgbClr val="9A9A9A"/>
                 </a:solidFill>
                 <a:latin typeface="Helvetica" pitchFamily="2" charset="0"/>
               </a:rPr>
-              <a:t>3 / 6</a:t>
+              <a:t>3 / </a:t>
             </a:r>
+            <a:r>
+              <a:rPr lang="fr-FR" sz="800" dirty="0">
+                <a:solidFill>
+                  <a:srgbClr val="9A9A9A"/>
+                </a:solidFill>
+                <a:latin typeface="Helvetica" pitchFamily="2" charset="0"/>
+              </a:rPr>
+              <a:t>4</a:t>
+            </a:r>
+            <a:endParaRPr sz="800" b="0" dirty="0">
+              <a:solidFill>
+                <a:srgbClr val="9A9A9A"/>
+              </a:solidFill>
+              <a:latin typeface="Helvetica" pitchFamily="2" charset="0"/>
+            </a:endParaRPr>
           </a:p>
         </p:txBody>
       </p:sp>
@@ -18979,23 +19051,8 @@
                   </a:solidFill>
                   <a:latin typeface="Helvetica Light" panose="020B0403020202020204" pitchFamily="34" charset="0"/>
                 </a:rPr>
-                <a:t> – Association of </a:t>
-              </a:r>
-              <a:r>
-                <a:rPr sz="900" dirty="0">
-                  <a:solidFill>
-                    <a:srgbClr val="666666"/>
-                  </a:solidFill>
-                  <a:latin typeface="Helvetica Light" panose="020B0403020202020204" pitchFamily="34" charset="0"/>
-                </a:rPr>
-                <a:t>young researchers</a:t>
-              </a:r>
-              <a:endParaRPr sz="900" dirty="0">
-                <a:solidFill>
-                  <a:srgbClr val="666666"/>
-                </a:solidFill>
-                <a:latin typeface="Helvetica Light" panose="020B0403020202020204" pitchFamily="34" charset="0"/>
-              </a:endParaRPr>
+                <a:t> – Association of young researchers</a:t>
+              </a:r>
             </a:p>
           </p:txBody>
         </p:sp>
@@ -22306,14 +22363,38 @@
               </a:spcAft>
             </a:pPr>
             <a:r>
-              <a:rPr sz="800" b="0">
+              <a:rPr lang="fr-FR" sz="800" dirty="0">
                 <a:solidFill>
                   <a:srgbClr val="9A9A9A"/>
                 </a:solidFill>
                 <a:latin typeface="Helvetica" pitchFamily="2" charset="0"/>
               </a:rPr>
-              <a:t>6 / 6</a:t>
+              <a:t>4 </a:t>
             </a:r>
+            <a:r>
+              <a:rPr sz="800" b="0" dirty="0">
+                <a:solidFill>
+                  <a:srgbClr val="9A9A9A"/>
+                </a:solidFill>
+                <a:latin typeface="Helvetica" pitchFamily="2" charset="0"/>
+              </a:rPr>
+              <a:t>/ </a:t>
+            </a:r>
+            <a:r>
+              <a:rPr lang="fr-FR" sz="800" b="0" dirty="0">
+                <a:solidFill>
+                  <a:srgbClr val="9A9A9A"/>
+                </a:solidFill>
+                <a:latin typeface="Helvetica" pitchFamily="2" charset="0"/>
+              </a:rPr>
+              <a:t>4</a:t>
+            </a:r>
+            <a:endParaRPr sz="800" b="0" dirty="0">
+              <a:solidFill>
+                <a:srgbClr val="9A9A9A"/>
+              </a:solidFill>
+              <a:latin typeface="Helvetica" pitchFamily="2" charset="0"/>
+            </a:endParaRPr>
           </a:p>
         </p:txBody>
       </p:sp>
